--- a/public/fun/pack/pptx/familypro/가족소개프리미엄_02_아이와함께_블러시샴페인.pptx
+++ b/public/fun/pack/pptx/familypro/가족소개프리미엄_02_아이와함께_블러시샴페인.pptx
@@ -113,12 +113,12 @@
   <p:extLst>
     <p:ext uri="{521415D9-36F7-43E2-AB2F-B90AF26B5E84}">
       <p14:sectionLst xmlns:p14="http://schemas.microsoft.com/office/powerpoint/2010/main">
-        <p14:section name="시작" id="{D02B017D-FF6A-44CB-BE36-F663D6B0EA1B}">
+        <p14:section name="시작" id="{FD7251CF-A077-42BE-BCF5-E4135024C509}">
           <p14:sldIdLst>
             <p14:sldId id="256"/>
           </p14:sldIdLst>
         </p14:section>
-        <p14:section name="본문" id="{3F494879-1156-4406-87A9-6B1D1E345DC7}">
+        <p14:section name="본문" id="{3C513544-4875-4537-9D6B-F2F51E2667C9}">
           <p14:sldIdLst>
             <p14:sldId id="257"/>
             <p14:sldId id="258"/>
@@ -127,7 +127,7 @@
             <p14:sldId id="261"/>
           </p14:sldIdLst>
         </p14:section>
-        <p14:section name="마무리" id="{D78ADEBF-C2AB-43AC-A768-C205C7359747}">
+        <p14:section name="마무리" id="{A214586C-D47B-4A81-90C1-693BF57D178A}">
           <p14:sldIdLst>
             <p14:sldId id="262"/>
           </p14:sldIdLst>
@@ -1537,7 +1537,7 @@
             </a:lvl1pPr>
           </a:lstStyle>
           <a:p>
-            <a:fld id="{16B10EF8-2C06-4BEC-8050-8ED919E4AFD7}" type="slidenum">
+            <a:fld id="{7C04B26A-6967-4113-9A4A-70DE05CC25E6}" type="slidenum">
               <a:rPr lang="en-US"/>
               <a:t>‹#›</a:t>
             </a:fld>
@@ -2216,7 +2216,7 @@
             </a:lvl1pPr>
           </a:lstStyle>
           <a:p>
-            <a:fld id="{10E95BE8-F73A-4584-A6F3-BECC5E431515}" type="slidenum">
+            <a:fld id="{E9D3A5C4-9596-4602-B041-87F2D55989A1}" type="slidenum">
               <a:rPr lang="en-US"/>
               <a:t>‹#›</a:t>
             </a:fld>
@@ -2894,7 +2894,7 @@
             </a:lvl1pPr>
           </a:lstStyle>
           <a:p>
-            <a:fld id="{E7AB0910-32CC-4420-8CA0-BD6CF001F7B1}" type="slidenum">
+            <a:fld id="{12BE17EC-59BD-4458-82B1-68C3C88E4275}" type="slidenum">
               <a:rPr lang="en-US"/>
               <a:t>‹#›</a:t>
             </a:fld>
@@ -3735,7 +3735,7 @@
           <a:p>
             <a:r>
               <a:rPr lang="ko-KR"/>
-              <a:t>입춘날 마루에 앉아 아이와 한 장</a:t>
+              <a:t>대문 앞 마루에 앉아 아이와 한 장</a:t>
             </a:r>
           </a:p>
         </p:txBody>
@@ -3757,7 +3757,7 @@
           <a:p>
             <a:r>
               <a:rPr lang="ko-KR"/>
-              <a:t>아이와 함께 · 0000. 00. 00</a:t>
+              <a:t>아이와 함께 · 날짜 입력</a:t>
             </a:r>
           </a:p>
         </p:txBody>
@@ -4118,7 +4118,7 @@
           <a:bodyPr/>
           <a:lstStyle/>
           <a:p>
-            <a:fld id="{EDAE2EF1-A72E-4E1B-8C78-B0D245E247C1}" type="slidenum">
+            <a:fld id="{AB4CB9B3-2F54-4722-B425-1221FF5DD7A5}" type="slidenum">
               <a:rPr lang="en-US"/>
               <a:t>‹#›</a:t>
             </a:fld>
@@ -4934,7 +4934,7 @@
           <a:bodyPr/>
           <a:lstStyle/>
           <a:p>
-            <a:fld id="{34C45FED-DD6D-4984-86BF-E41616DBBC5D}" type="slidenum">
+            <a:fld id="{622483A1-0119-42D2-9E1D-5B246E47C502}" type="slidenum">
               <a:rPr lang="en-US"/>
               <a:t>‹#›</a:t>
             </a:fld>
@@ -5909,7 +5909,7 @@
           <a:bodyPr/>
           <a:lstStyle/>
           <a:p>
-            <a:fld id="{A9A93AA9-3F2E-4F36-A17A-8526977671CD}" type="slidenum">
+            <a:fld id="{A9EFFCDF-26BF-4E62-BD3A-46D6CA2A1826}" type="slidenum">
               <a:rPr lang="en-US"/>
               <a:t>‹#›</a:t>
             </a:fld>
@@ -7257,7 +7257,7 @@
           <a:bodyPr/>
           <a:lstStyle/>
           <a:p>
-            <a:fld id="{55F233A7-A4DF-4EE1-9B74-952CB8D316DB}" type="slidenum">
+            <a:fld id="{4BBB6E27-3528-4961-92CD-7DB4B5DBE5C4}" type="slidenum">
               <a:rPr lang="en-US"/>
               <a:t>‹#›</a:t>
             </a:fld>
@@ -7345,7 +7345,7 @@
           <a:bodyPr/>
           <a:lstStyle/>
           <a:p>
-            <a:fld id="{68EAC42D-125B-4F6D-AF1A-7BE5645D7103}" type="slidenum">
+            <a:fld id="{715A34F7-8899-4523-9D2C-313AF391502A}" type="slidenum">
               <a:rPr lang="en-US"/>
               <a:t>‹#›</a:t>
             </a:fld>
